--- a/products/pack1-pm-essentials/pm-briefing-deck.pptx
+++ b/products/pack1-pm-essentials/pm-briefing-deck.pptx
@@ -512,10 +512,24 @@
           <a:lstStyle/>
           <a:p>
             <a:r>
-              <a:rPr lang="en-US" dirty="0"/>
-              <a:t/>
+              <a:t>WHAT LEADERSHIP WILL ASK</a:t>
             </a:r>
-            <a:endParaRPr lang="en-US" dirty="0"/>
+          </a:p>
+          <a:p>
+            <a:r>
+              <a:t>They will ask: What changed since last time? Have a one-sentence answer ready before the title slide is off the screen.</a:t>
+            </a:r>
+          </a:p>
+          <a:p/>
+          <a:p>
+            <a:r>
+              <a:t>IF THIS SLIDE IS RED (or you are asked to defend it)</a:t>
+            </a:r>
+          </a:p>
+          <a:p>
+            <a:r>
+              <a:t>Say the classification level out loud. Confirm the audience and the decision you need from them today, if any.</a:t>
+            </a:r>
           </a:p>
         </p:txBody>
       </p:sp>
@@ -600,10 +614,24 @@
           <a:lstStyle/>
           <a:p>
             <a:r>
-              <a:rPr lang="en-US" dirty="0"/>
-              <a:t/>
+              <a:t>WHAT LEADERSHIP WILL ASK</a:t>
             </a:r>
-            <a:endParaRPr lang="en-US" dirty="0"/>
+          </a:p>
+          <a:p>
+            <a:r>
+              <a:t>They will ask: What is overdue? What do you need from us to close it?</a:t>
+            </a:r>
+          </a:p>
+          <a:p/>
+          <a:p>
+            <a:r>
+              <a:t>IF THIS SLIDE IS RED (or you are asked to defend it)</a:t>
+            </a:r>
+          </a:p>
+          <a:p>
+            <a:r>
+              <a:t>Any action older than 60 days gets explained or closed. Ask for help on this slide; that is what it is for.</a:t>
+            </a:r>
           </a:p>
         </p:txBody>
       </p:sp>
@@ -688,10 +716,24 @@
           <a:lstStyle/>
           <a:p>
             <a:r>
-              <a:rPr lang="en-US" dirty="0"/>
-              <a:t/>
+              <a:t>WHAT LEADERSHIP WILL ASK</a:t>
             </a:r>
-            <a:endParaRPr lang="en-US" dirty="0"/>
+          </a:p>
+          <a:p>
+            <a:r>
+              <a:t>They will ask: What decision do you need from me, and by when?</a:t>
+            </a:r>
+          </a:p>
+          <a:p/>
+          <a:p>
+            <a:r>
+              <a:t>IF THIS SLIDE IS RED (or you are asked to defend it)</a:t>
+            </a:r>
+          </a:p>
+          <a:p>
+            <a:r>
+              <a:t>If you need a decision, restate it here with the deadline and the cost of delay. If you do not need one, say so and stop.</a:t>
+            </a:r>
           </a:p>
         </p:txBody>
       </p:sp>
@@ -776,10 +818,24 @@
           <a:lstStyle/>
           <a:p>
             <a:r>
-              <a:rPr lang="en-US" dirty="0"/>
-              <a:t/>
+              <a:t>WHAT LEADERSHIP WILL ASK</a:t>
             </a:r>
-            <a:endParaRPr lang="en-US" dirty="0"/>
+          </a:p>
+          <a:p>
+            <a:r>
+              <a:t>They will ask: Can I see the detail behind slide X?</a:t>
+            </a:r>
+          </a:p>
+          <a:p/>
+          <a:p>
+            <a:r>
+              <a:t>IF THIS SLIDE IS RED (or you are asked to defend it)</a:t>
+            </a:r>
+          </a:p>
+          <a:p>
+            <a:r>
+              <a:t>Keep the spend plan table, the full risk register, and the IMS excerpt here. Do not present them; have them ready.</a:t>
+            </a:r>
           </a:p>
         </p:txBody>
       </p:sp>
@@ -864,10 +920,24 @@
           <a:lstStyle/>
           <a:p>
             <a:r>
-              <a:rPr lang="en-US" dirty="0"/>
-              <a:t/>
+              <a:t>WHAT LEADERSHIP WILL ASK</a:t>
             </a:r>
-            <a:endParaRPr lang="en-US" dirty="0"/>
+          </a:p>
+          <a:p>
+            <a:r>
+              <a:t>They will ask: How long is this? What do you need from me?</a:t>
+            </a:r>
+          </a:p>
+          <a:p/>
+          <a:p>
+            <a:r>
+              <a:t>IF THIS SLIDE IS RED (or you are asked to defend it)</a:t>
+            </a:r>
+          </a:p>
+          <a:p>
+            <a:r>
+              <a:t>State the ask up front: information only, or a decision. If a decision, name it here so nobody is surprised on slide 11.</a:t>
+            </a:r>
           </a:p>
         </p:txBody>
       </p:sp>
@@ -952,10 +1022,24 @@
           <a:lstStyle/>
           <a:p>
             <a:r>
-              <a:rPr lang="en-US" dirty="0"/>
-              <a:t/>
+              <a:t>WHAT LEADERSHIP WILL ASK</a:t>
             </a:r>
-            <a:endParaRPr lang="en-US" dirty="0"/>
+          </a:p>
+          <a:p>
+            <a:r>
+              <a:t>They will ask: Why is that light red? What are you doing about it? When will it be green?</a:t>
+            </a:r>
+          </a:p>
+          <a:p/>
+          <a:p>
+            <a:r>
+              <a:t>IF THIS SLIDE IS RED (or you are asked to defend it)</a:t>
+            </a:r>
+          </a:p>
+          <a:p>
+            <a:r>
+              <a:t>If red: one sentence on cause, one on the fix, one on the date. Never explain a red for more than 30 seconds on this slide; the detail is later.</a:t>
+            </a:r>
           </a:p>
         </p:txBody>
       </p:sp>
@@ -1040,10 +1124,24 @@
           <a:lstStyle/>
           <a:p>
             <a:r>
-              <a:rPr lang="en-US" dirty="0"/>
-              <a:t/>
+              <a:t>WHAT LEADERSHIP WILL ASK</a:t>
             </a:r>
-            <a:endParaRPr lang="en-US" dirty="0"/>
+          </a:p>
+          <a:p>
+            <a:r>
+              <a:t>They will ask: Are we on the baseline? What is the biggest thing that could take us off it?</a:t>
+            </a:r>
+          </a:p>
+          <a:p/>
+          <a:p>
+            <a:r>
+              <a:t>IF THIS SLIDE IS RED (or you are asked to defend it)</a:t>
+            </a:r>
+          </a:p>
+          <a:p>
+            <a:r>
+              <a:t>Name your top risk here even though the risk slide is later. Leadership remembers what you led with.</a:t>
+            </a:r>
           </a:p>
         </p:txBody>
       </p:sp>
@@ -1128,10 +1226,24 @@
           <a:lstStyle/>
           <a:p>
             <a:r>
-              <a:rPr lang="en-US" dirty="0"/>
-              <a:t/>
+              <a:t>WHAT LEADERSHIP WILL ASK</a:t>
             </a:r>
-            <a:endParaRPr lang="en-US" dirty="0"/>
+          </a:p>
+          <a:p>
+            <a:r>
+              <a:t>They will ask: What is on the critical path? How much float do we have? What slipped and why?</a:t>
+            </a:r>
+          </a:p>
+          <a:p/>
+          <a:p>
+            <a:r>
+              <a:t>IF THIS SLIDE IS RED (or you are asked to defend it)</a:t>
+            </a:r>
+          </a:p>
+          <a:p>
+            <a:r>
+              <a:t>If SPI is below 0.95: say what task drove it and whether it recovers or is permanent. 'The contractor is working it' is not an answer.</a:t>
+            </a:r>
           </a:p>
         </p:txBody>
       </p:sp>
@@ -1216,10 +1328,24 @@
           <a:lstStyle/>
           <a:p>
             <a:r>
-              <a:rPr lang="en-US" dirty="0"/>
-              <a:t/>
+              <a:t>WHAT LEADERSHIP WILL ASK</a:t>
             </a:r>
-            <a:endParaRPr lang="en-US" dirty="0"/>
+          </a:p>
+          <a:p>
+            <a:r>
+              <a:t>They will ask: What is the EAC? Do you believe it? How much management reserve is left?</a:t>
+            </a:r>
+          </a:p>
+          <a:p/>
+          <a:p>
+            <a:r>
+              <a:t>IF THIS SLIDE IS RED (or you are asked to defend it)</a:t>
+            </a:r>
+          </a:p>
+          <a:p>
+            <a:r>
+              <a:t>If CPI is below 0.95: state your independent EAC, not just the contractor's. If they differ by more than 5%, say why.</a:t>
+            </a:r>
           </a:p>
         </p:txBody>
       </p:sp>
@@ -1304,10 +1430,24 @@
           <a:lstStyle/>
           <a:p>
             <a:r>
-              <a:rPr lang="en-US" dirty="0"/>
-              <a:t/>
+              <a:t>WHAT LEADERSHIP WILL ASK</a:t>
             </a:r>
-            <a:endParaRPr lang="en-US" dirty="0"/>
+          </a:p>
+          <a:p>
+            <a:r>
+              <a:t>They will ask: What is new? What got worse? Who owns the red ones?</a:t>
+            </a:r>
+          </a:p>
+          <a:p/>
+          <a:p>
+            <a:r>
+              <a:t>IF THIS SLIDE IS RED (or you are asked to defend it)</a:t>
+            </a:r>
+          </a:p>
+          <a:p>
+            <a:r>
+              <a:t>Show the Risk Map from the workbook. Every HIGH risk needs an owner by name and a mitigation with a date. If you cannot name the owner, that is the finding.</a:t>
+            </a:r>
           </a:p>
         </p:txBody>
       </p:sp>
@@ -1392,10 +1532,24 @@
           <a:lstStyle/>
           <a:p>
             <a:r>
-              <a:rPr lang="en-US" dirty="0"/>
-              <a:t/>
+              <a:t>WHAT LEADERSHIP WILL ASK</a:t>
             </a:r>
-            <a:endParaRPr lang="en-US" dirty="0"/>
+          </a:p>
+          <a:p>
+            <a:r>
+              <a:t>They will ask: Are requirements stable? What is the next design review and are we ready?</a:t>
+            </a:r>
+          </a:p>
+          <a:p/>
+          <a:p>
+            <a:r>
+              <a:t>IF THIS SLIDE IS RED (or you are asked to defend it)</a:t>
+            </a:r>
+          </a:p>
+          <a:p>
+            <a:r>
+              <a:t>If a technical review slipped: was it the contractor, the government, or requirements? Say which. It changes the fix.</a:t>
+            </a:r>
           </a:p>
         </p:txBody>
       </p:sp>
@@ -1480,10 +1634,24 @@
           <a:lstStyle/>
           <a:p>
             <a:r>
-              <a:rPr lang="en-US" dirty="0"/>
-              <a:t/>
+              <a:t>WHAT LEADERSHIP WILL ASK</a:t>
             </a:r>
-            <a:endParaRPr lang="en-US" dirty="0"/>
+          </a:p>
+          <a:p>
+            <a:r>
+              <a:t>They will ask: Would you give them this CPARS rating today? Any CARs open?</a:t>
+            </a:r>
+          </a:p>
+          <a:p/>
+          <a:p>
+            <a:r>
+              <a:t>IF THIS SLIDE IS RED (or you are asked to defend it)</a:t>
+            </a:r>
+          </a:p>
+          <a:p>
+            <a:r>
+              <a:t>Tie every rating to evidence from this period. If you are heading toward a Marginal, leadership should hear it here, not at the annual rating.</a:t>
+            </a:r>
           </a:p>
         </p:txBody>
       </p:sp>
